--- a/vector-legal-04-mono-swiss.pptx
+++ b/vector-legal-04-mono-swiss.pptx
@@ -3348,7 +3348,7 @@
                 </a:solidFill>
                 <a:latin typeface="Inter Display"/>
               </a:rPr>
-              <a:t>167</a:t>
+              <a:t>168</a:t>
             </a:r>
           </a:p>
         </p:txBody>
@@ -3523,7 +3523,7 @@
                 </a:solidFill>
                 <a:latin typeface="Inter"/>
               </a:rPr>
-              <a:t>Адаптация из anthropics/claude-for-legal · Apache-2.0</a:t>
+              <a:t>Адаптация anthropics/claude-for-legal (Apache-2.0) · код — MIT</a:t>
             </a:r>
           </a:p>
         </p:txBody>
@@ -4808,8 +4808,8 @@
         </p:nvSpPr>
         <p:spPr>
           <a:xfrm>
-            <a:off x="8778240" y="6528816"/>
-            <a:ext cx="2834640" cy="228600"/>
+            <a:off x="7498079" y="6528816"/>
+            <a:ext cx="4114800" cy="228600"/>
           </a:xfrm>
           <a:prstGeom prst="rect">
             <a:avLst/>
@@ -5718,8 +5718,8 @@
         </p:nvSpPr>
         <p:spPr>
           <a:xfrm>
-            <a:off x="8778240" y="6528816"/>
-            <a:ext cx="2834640" cy="228600"/>
+            <a:off x="7498079" y="6528816"/>
+            <a:ext cx="4114800" cy="228600"/>
           </a:xfrm>
           <a:prstGeom prst="rect">
             <a:avLst/>
@@ -5916,7 +5916,7 @@
                 </a:solidFill>
                 <a:latin typeface="Inter"/>
               </a:rPr>
-              <a:t>12 плагинов · 167 навыков · адаптация claude-for-legal под право РФ</a:t>
+              <a:t>12 плагинов · 168 навыков · адаптация claude-for-legal под право РФ</a:t>
             </a:r>
           </a:p>
         </p:txBody>
@@ -6030,7 +6030,7 @@
                 </a:solidFill>
                 <a:latin typeface="Inter"/>
               </a:rPr>
-              <a:t>Apache-2.0 · структурная база: anthropics/claude-for-legal (Anthropic)</a:t>
+              <a:t>MIT · структурная база: anthropics/claude-for-legal (Anthropic, Apache-2.0)</a:t>
             </a:r>
           </a:p>
         </p:txBody>
@@ -7253,7 +7253,7 @@
                 </a:solidFill>
                 <a:latin typeface="Inter"/>
               </a:rPr>
-              <a:t>Адаптация (Osmosy, Apache-2.0) — русское право + Hermes Agent + расширения:</a:t>
+              <a:t>Адаптация (Osmosy, MIT) — русское право + Hermes Agent + расширения:</a:t>
             </a:r>
           </a:p>
         </p:txBody>
@@ -7336,8 +7336,8 @@
         </p:nvSpPr>
         <p:spPr>
           <a:xfrm>
-            <a:off x="8778240" y="6528816"/>
-            <a:ext cx="2834640" cy="228600"/>
+            <a:off x="7498079" y="6528816"/>
+            <a:ext cx="4114800" cy="228600"/>
           </a:xfrm>
           <a:prstGeom prst="rect">
             <a:avLst/>
@@ -8804,8 +8804,8 @@
         </p:nvSpPr>
         <p:spPr>
           <a:xfrm>
-            <a:off x="8778240" y="6528816"/>
-            <a:ext cx="2834640" cy="228600"/>
+            <a:off x="7498079" y="6528816"/>
+            <a:ext cx="4114800" cy="228600"/>
           </a:xfrm>
           <a:prstGeom prst="rect">
             <a:avLst/>
@@ -10000,8 +10000,8 @@
         </p:nvSpPr>
         <p:spPr>
           <a:xfrm>
-            <a:off x="8778240" y="6528816"/>
-            <a:ext cx="2834640" cy="228600"/>
+            <a:off x="7498079" y="6528816"/>
+            <a:ext cx="4114800" cy="228600"/>
           </a:xfrm>
           <a:prstGeom prst="rect">
             <a:avLst/>
@@ -11275,8 +11275,8 @@
         </p:nvSpPr>
         <p:spPr>
           <a:xfrm>
-            <a:off x="8778240" y="6528816"/>
-            <a:ext cx="2834640" cy="228600"/>
+            <a:off x="7498079" y="6528816"/>
+            <a:ext cx="4114800" cy="228600"/>
           </a:xfrm>
           <a:prstGeom prst="rect">
             <a:avLst/>
@@ -12307,8 +12307,8 @@
         </p:nvSpPr>
         <p:spPr>
           <a:xfrm>
-            <a:off x="8778240" y="6528816"/>
-            <a:ext cx="2834640" cy="228600"/>
+            <a:off x="7498079" y="6528816"/>
+            <a:ext cx="4114800" cy="228600"/>
           </a:xfrm>
           <a:prstGeom prst="rect">
             <a:avLst/>
@@ -13643,8 +13643,8 @@
         </p:nvSpPr>
         <p:spPr>
           <a:xfrm>
-            <a:off x="8778240" y="6528816"/>
-            <a:ext cx="2834640" cy="228600"/>
+            <a:off x="7498079" y="6528816"/>
+            <a:ext cx="4114800" cy="228600"/>
           </a:xfrm>
           <a:prstGeom prst="rect">
             <a:avLst/>
@@ -14734,7 +14734,7 @@
                 </a:solidFill>
                 <a:latin typeface="Inter"/>
               </a:rPr>
-              <a:t>Без MCP все цитаты — [модель знания — проверь]</a:t>
+              <a:t>Без MCP все цитаты — [model knowledge — verify]</a:t>
             </a:r>
           </a:p>
         </p:txBody>
@@ -14817,8 +14817,8 @@
         </p:nvSpPr>
         <p:spPr>
           <a:xfrm>
-            <a:off x="8778240" y="6528816"/>
-            <a:ext cx="2834640" cy="228600"/>
+            <a:off x="7498079" y="6528816"/>
+            <a:ext cx="4114800" cy="228600"/>
           </a:xfrm>
           <a:prstGeom prst="rect">
             <a:avLst/>
@@ -16070,8 +16070,8 @@
         </p:nvSpPr>
         <p:spPr>
           <a:xfrm>
-            <a:off x="8778240" y="6528816"/>
-            <a:ext cx="2834640" cy="228600"/>
+            <a:off x="7498079" y="6528816"/>
+            <a:ext cx="4114800" cy="228600"/>
           </a:xfrm>
           <a:prstGeom prst="rect">
             <a:avLst/>

--- a/vector-legal-04-mono-swiss.pptx
+++ b/vector-legal-04-mono-swiss.pptx
@@ -3563,6 +3563,30 @@
           </a:p>
         </p:txBody>
       </p:sp>
+      <p:pic>
+        <p:nvPicPr>
+          <p:cNvPr id="15" name="Picture 14" descr="vector_ray_t.png"/>
+          <p:cNvPicPr>
+            <a:picLocks noChangeAspect="1"/>
+          </p:cNvPicPr>
+          <p:nvPr/>
+        </p:nvPicPr>
+        <p:blipFill>
+          <a:blip r:embed="rId2"/>
+          <a:stretch>
+            <a:fillRect/>
+          </a:stretch>
+        </p:blipFill>
+        <p:spPr>
+          <a:xfrm>
+            <a:off x="11155680" y="274320"/>
+            <a:ext cx="822960" cy="582402"/>
+          </a:xfrm>
+          <a:prstGeom prst="rect">
+            <a:avLst/>
+          </a:prstGeom>
+        </p:spPr>
+      </p:pic>
     </p:spTree>
   </p:cSld>
   <p:clrMapOvr>
